--- a/churn PPTX Presentation.pptx
+++ b/churn PPTX Presentation.pptx
@@ -7,13 +7,15 @@
   <p:sldIdLst>
     <p:sldId id="256" r:id="rId3"/>
     <p:sldId id="257" r:id="rId4"/>
-    <p:sldId id="259" r:id="rId5"/>
-    <p:sldId id="264" r:id="rId6"/>
+    <p:sldId id="266" r:id="rId5"/>
+    <p:sldId id="259" r:id="rId6"/>
     <p:sldId id="265" r:id="rId7"/>
-    <p:sldId id="260" r:id="rId8"/>
-    <p:sldId id="261" r:id="rId9"/>
-    <p:sldId id="262" r:id="rId10"/>
-    <p:sldId id="263" r:id="rId11"/>
+    <p:sldId id="268" r:id="rId8"/>
+    <p:sldId id="267" r:id="rId9"/>
+    <p:sldId id="260" r:id="rId10"/>
+    <p:sldId id="261" r:id="rId11"/>
+    <p:sldId id="262" r:id="rId12"/>
+    <p:sldId id="263" r:id="rId13"/>
   </p:sldIdLst>
   <p:sldSz cx="12192000" cy="6858000"/>
   <p:notesSz cx="6858000" cy="9144000"/>
@@ -3138,7 +3140,7 @@
       </p:sp>
       <p:sp>
         <p:nvSpPr>
-          <p:cNvPr id="3" name="Subtitle 2"/>
+          <p:cNvPr id="4" name="Subtitle 3"/>
           <p:cNvSpPr>
             <a:spLocks noGrp="1"/>
           </p:cNvSpPr>
@@ -3149,9 +3151,12 @@
         <p:spPr/>
         <p:txBody>
           <a:bodyPr/>
-          <a:lstStyle/>
-          <a:p>
-            <a:endParaRPr lang="en-US"/>
+          <a:p>
+            <a:r>
+              <a:rPr lang="en-GB" altLang="en-US"/>
+              <a:t>BY KEVIN KISENGU</a:t>
+            </a:r>
+            <a:endParaRPr lang="en-GB" altLang="en-US"/>
           </a:p>
         </p:txBody>
       </p:sp>
@@ -3163,522 +3168,7 @@
 </p:sld>
 </file>
 
-<file path=ppt/slides/slide2.xml><?xml version="1.0" encoding="utf-8"?>
-<p:sld xmlns:a="http://schemas.openxmlformats.org/drawingml/2006/main" xmlns:r="http://schemas.openxmlformats.org/officeDocument/2006/relationships" xmlns:p="http://schemas.openxmlformats.org/presentationml/2006/main">
-  <p:cSld>
-    <p:spTree>
-      <p:nvGrpSpPr>
-        <p:cNvPr id="1" name=""/>
-        <p:cNvGrpSpPr/>
-        <p:nvPr/>
-      </p:nvGrpSpPr>
-      <p:grpSpPr/>
-      <p:sp>
-        <p:nvSpPr>
-          <p:cNvPr id="4" name="Title 3"/>
-          <p:cNvSpPr>
-            <a:spLocks noGrp="1"/>
-          </p:cNvSpPr>
-          <p:nvPr>
-            <p:ph type="title"/>
-          </p:nvPr>
-        </p:nvSpPr>
-        <p:spPr/>
-        <p:txBody>
-          <a:bodyPr/>
-          <a:p>
-            <a:r>
-              <a:rPr lang="en-GB" altLang="en-US"/>
-              <a:t>BUSINESS PROBLEM</a:t>
-            </a:r>
-            <a:endParaRPr lang="en-GB" altLang="en-US"/>
-          </a:p>
-        </p:txBody>
-      </p:sp>
-      <p:sp>
-        <p:nvSpPr>
-          <p:cNvPr id="5" name="Content Placeholder 4"/>
-          <p:cNvSpPr>
-            <a:spLocks noGrp="1"/>
-          </p:cNvSpPr>
-          <p:nvPr>
-            <p:ph idx="1"/>
-          </p:nvPr>
-        </p:nvSpPr>
-        <p:spPr/>
-        <p:txBody>
-          <a:bodyPr/>
-          <a:p>
-            <a:r>
-              <a:rPr lang="en-GB" altLang="en-US"/>
-              <a:t>we want to identify “at-risk” customers before they leave since every customer who leaves costs syriatel money.</a:t>
-            </a:r>
-            <a:endParaRPr lang="en-GB" altLang="en-US"/>
-          </a:p>
-          <a:p>
-            <a:r>
-              <a:rPr lang="en-GB" altLang="en-US"/>
-              <a:t>This can be achieved by pondering the question, “Are there any predictable patterns in customer behaviour?”</a:t>
-            </a:r>
-            <a:endParaRPr lang="en-GB" altLang="en-US"/>
-          </a:p>
-        </p:txBody>
-      </p:sp>
-    </p:spTree>
-  </p:cSld>
-  <p:clrMapOvr>
-    <a:masterClrMapping/>
-  </p:clrMapOvr>
-</p:sld>
-</file>
-
-<file path=ppt/slides/slide3.xml><?xml version="1.0" encoding="utf-8"?>
-<p:sld xmlns:a="http://schemas.openxmlformats.org/drawingml/2006/main" xmlns:r="http://schemas.openxmlformats.org/officeDocument/2006/relationships" xmlns:p="http://schemas.openxmlformats.org/presentationml/2006/main">
-  <p:cSld>
-    <p:spTree>
-      <p:nvGrpSpPr>
-        <p:cNvPr id="1" name=""/>
-        <p:cNvGrpSpPr/>
-        <p:nvPr/>
-      </p:nvGrpSpPr>
-      <p:grpSpPr/>
-      <p:sp>
-        <p:nvSpPr>
-          <p:cNvPr id="4" name="Title 3"/>
-          <p:cNvSpPr>
-            <a:spLocks noGrp="1"/>
-          </p:cNvSpPr>
-          <p:nvPr>
-            <p:ph type="title"/>
-          </p:nvPr>
-        </p:nvSpPr>
-        <p:spPr/>
-        <p:txBody>
-          <a:bodyPr/>
-          <a:p>
-            <a:r>
-              <a:rPr lang="en-GB" altLang="en-US"/>
-              <a:t>DATA ANALYSIS/APPROACH</a:t>
-            </a:r>
-            <a:endParaRPr lang="en-GB" altLang="en-US"/>
-          </a:p>
-        </p:txBody>
-      </p:sp>
-      <p:sp>
-        <p:nvSpPr>
-          <p:cNvPr id="5" name="Content Placeholder 4"/>
-          <p:cNvSpPr>
-            <a:spLocks noGrp="1"/>
-          </p:cNvSpPr>
-          <p:nvPr>
-            <p:ph idx="1"/>
-          </p:nvPr>
-        </p:nvSpPr>
-        <p:spPr/>
-        <p:txBody>
-          <a:bodyPr/>
-          <a:p>
-            <a:r>
-              <a:rPr lang="en-GB" altLang="en-US"/>
-              <a:t>Built two different prediction models using the syriatel churn dataset</a:t>
-            </a:r>
-            <a:endParaRPr lang="en-GB" altLang="en-US"/>
-          </a:p>
-          <a:p>
-            <a:pPr marL="0" indent="0">
-              <a:buNone/>
-            </a:pPr>
-            <a:r>
-              <a:rPr lang="en-GB" altLang="en-US"/>
-              <a:t>  (LOGISTIC REGRESSION and DECISION TREE)</a:t>
-            </a:r>
-            <a:endParaRPr lang="en-GB" altLang="en-US"/>
-          </a:p>
-          <a:p>
-            <a:r>
-              <a:rPr lang="en-GB" altLang="en-US"/>
-              <a:t>Trained on 80% of customers and tested on the remaining 20%.</a:t>
-            </a:r>
-            <a:endParaRPr lang="en-GB" altLang="en-US"/>
-          </a:p>
-          <a:p>
-            <a:pPr marL="0" indent="0">
-              <a:buNone/>
-            </a:pPr>
-            <a:r>
-              <a:rPr lang="en-GB" altLang="en-US"/>
-              <a:t>   KEYWORDS</a:t>
-            </a:r>
-            <a:endParaRPr lang="en-GB" altLang="en-US"/>
-          </a:p>
-          <a:p>
-            <a:r>
-              <a:rPr lang="en-GB" altLang="en-US"/>
-              <a:t>roc-auc - a measure of how well the model seperates leavers from stayers.</a:t>
-            </a:r>
-            <a:endParaRPr lang="en-GB" altLang="en-US"/>
-          </a:p>
-          <a:p>
-            <a:r>
-              <a:rPr lang="en-GB" altLang="en-US"/>
-              <a:t>recall - of all customers who actually left,how many did we catch?</a:t>
-            </a:r>
-            <a:endParaRPr lang="en-GB" altLang="en-US"/>
-          </a:p>
-          <a:p>
-            <a:r>
-              <a:rPr lang="en-GB" altLang="en-US"/>
-              <a:t>precision - of customers flagged as “high risk” , how many actually left?</a:t>
-            </a:r>
-            <a:endParaRPr lang="en-GB" altLang="en-US"/>
-          </a:p>
-          <a:p>
-            <a:endParaRPr lang="en-GB" altLang="en-US"/>
-          </a:p>
-          <a:p>
-            <a:endParaRPr lang="en-GB" altLang="en-US"/>
-          </a:p>
-        </p:txBody>
-      </p:sp>
-    </p:spTree>
-  </p:cSld>
-  <p:clrMapOvr>
-    <a:masterClrMapping/>
-  </p:clrMapOvr>
-</p:sld>
-</file>
-
-<file path=ppt/slides/slide4.xml><?xml version="1.0" encoding="utf-8"?>
-<p:sld xmlns:a="http://schemas.openxmlformats.org/drawingml/2006/main" xmlns:r="http://schemas.openxmlformats.org/officeDocument/2006/relationships" xmlns:p="http://schemas.openxmlformats.org/presentationml/2006/main">
-  <p:cSld>
-    <p:spTree>
-      <p:nvGrpSpPr>
-        <p:cNvPr id="1" name=""/>
-        <p:cNvGrpSpPr/>
-        <p:nvPr/>
-      </p:nvGrpSpPr>
-      <p:grpSpPr/>
-      <p:sp>
-        <p:nvSpPr>
-          <p:cNvPr id="2" name="Title 1"/>
-          <p:cNvSpPr>
-            <a:spLocks noGrp="1"/>
-          </p:cNvSpPr>
-          <p:nvPr>
-            <p:ph type="title"/>
-          </p:nvPr>
-        </p:nvSpPr>
-        <p:spPr/>
-        <p:txBody>
-          <a:bodyPr/>
-          <a:p>
-            <a:r>
-              <a:rPr lang="en-GB" altLang="en-US"/>
-              <a:t>DECISION TREE</a:t>
-            </a:r>
-            <a:endParaRPr lang="en-GB" altLang="en-US"/>
-          </a:p>
-        </p:txBody>
-      </p:sp>
-      <p:pic>
-        <p:nvPicPr>
-          <p:cNvPr id="4" name="Content Placeholder 3" descr="decision tree"/>
-          <p:cNvPicPr>
-            <a:picLocks noChangeAspect="1"/>
-          </p:cNvPicPr>
-          <p:nvPr>
-            <p:ph idx="1"/>
-          </p:nvPr>
-        </p:nvPicPr>
-        <p:blipFill>
-          <a:blip r:embed="rId1"/>
-          <a:stretch>
-            <a:fillRect/>
-          </a:stretch>
-        </p:blipFill>
-        <p:spPr>
-          <a:xfrm>
-            <a:off x="895350" y="1856105"/>
-            <a:ext cx="10354945" cy="4235450"/>
-          </a:xfrm>
-          <a:prstGeom prst="rect">
-            <a:avLst/>
-          </a:prstGeom>
-        </p:spPr>
-      </p:pic>
-    </p:spTree>
-  </p:cSld>
-  <p:clrMapOvr>
-    <a:masterClrMapping/>
-  </p:clrMapOvr>
-</p:sld>
-</file>
-
-<file path=ppt/slides/slide5.xml><?xml version="1.0" encoding="utf-8"?>
-<p:sld xmlns:a="http://schemas.openxmlformats.org/drawingml/2006/main" xmlns:r="http://schemas.openxmlformats.org/officeDocument/2006/relationships" xmlns:p="http://schemas.openxmlformats.org/presentationml/2006/main">
-  <p:cSld>
-    <p:spTree>
-      <p:nvGrpSpPr>
-        <p:cNvPr id="1" name=""/>
-        <p:cNvGrpSpPr/>
-        <p:nvPr/>
-      </p:nvGrpSpPr>
-      <p:grpSpPr/>
-      <p:sp>
-        <p:nvSpPr>
-          <p:cNvPr id="2" name="Title 1"/>
-          <p:cNvSpPr>
-            <a:spLocks noGrp="1"/>
-          </p:cNvSpPr>
-          <p:nvPr>
-            <p:ph type="title"/>
-          </p:nvPr>
-        </p:nvSpPr>
-        <p:spPr/>
-        <p:txBody>
-          <a:bodyPr>
-            <a:normAutofit/>
-          </a:bodyPr>
-          <a:p>
-            <a:r>
-              <a:rPr lang="en-GB" altLang="en-US"/>
-              <a:t>LOGISTIC REGRESSION</a:t>
-            </a:r>
-            <a:endParaRPr lang="en-GB" altLang="en-US"/>
-          </a:p>
-        </p:txBody>
-      </p:sp>
-      <p:pic>
-        <p:nvPicPr>
-          <p:cNvPr id="4" name="Content Placeholder 3" descr="logistic regression"/>
-          <p:cNvPicPr>
-            <a:picLocks noChangeAspect="1"/>
-          </p:cNvPicPr>
-          <p:nvPr>
-            <p:ph idx="1"/>
-          </p:nvPr>
-        </p:nvPicPr>
-        <p:blipFill>
-          <a:blip r:embed="rId1"/>
-          <a:stretch>
-            <a:fillRect/>
-          </a:stretch>
-        </p:blipFill>
-        <p:spPr>
-          <a:xfrm>
-            <a:off x="838200" y="1927225"/>
-            <a:ext cx="10880725" cy="4045585"/>
-          </a:xfrm>
-          <a:prstGeom prst="rect">
-            <a:avLst/>
-          </a:prstGeom>
-        </p:spPr>
-      </p:pic>
-    </p:spTree>
-  </p:cSld>
-  <p:clrMapOvr>
-    <a:masterClrMapping/>
-  </p:clrMapOvr>
-</p:sld>
-</file>
-
-<file path=ppt/slides/slide6.xml><?xml version="1.0" encoding="utf-8"?>
-<p:sld xmlns:a="http://schemas.openxmlformats.org/drawingml/2006/main" xmlns:r="http://schemas.openxmlformats.org/officeDocument/2006/relationships" xmlns:p="http://schemas.openxmlformats.org/presentationml/2006/main">
-  <p:cSld>
-    <p:spTree>
-      <p:nvGrpSpPr>
-        <p:cNvPr id="1" name=""/>
-        <p:cNvGrpSpPr/>
-        <p:nvPr/>
-      </p:nvGrpSpPr>
-      <p:grpSpPr/>
-      <p:sp>
-        <p:nvSpPr>
-          <p:cNvPr id="4" name="Title 3"/>
-          <p:cNvSpPr>
-            <a:spLocks noGrp="1"/>
-          </p:cNvSpPr>
-          <p:nvPr>
-            <p:ph type="title"/>
-          </p:nvPr>
-        </p:nvSpPr>
-        <p:spPr/>
-        <p:txBody>
-          <a:bodyPr/>
-          <a:p>
-            <a:r>
-              <a:rPr lang="en-GB" altLang="en-US"/>
-              <a:t>BUSINESS FINDINGS</a:t>
-            </a:r>
-            <a:endParaRPr lang="en-GB" altLang="en-US"/>
-          </a:p>
-        </p:txBody>
-      </p:sp>
-      <p:sp>
-        <p:nvSpPr>
-          <p:cNvPr id="5" name="Content Placeholder 4"/>
-          <p:cNvSpPr>
-            <a:spLocks noGrp="1"/>
-          </p:cNvSpPr>
-          <p:nvPr>
-            <p:ph idx="1"/>
-          </p:nvPr>
-        </p:nvSpPr>
-        <p:spPr/>
-        <p:txBody>
-          <a:bodyPr/>
-          <a:p>
-            <a:r>
-              <a:rPr lang="en-GB" altLang="en-US"/>
-              <a:t>we found factors that increase churn risk:</a:t>
-            </a:r>
-            <a:endParaRPr lang="en-GB" altLang="en-US"/>
-          </a:p>
-          <a:p>
-            <a:r>
-              <a:rPr lang="en-GB" altLang="en-US"/>
-              <a:t>1. high number of customer service calls (greater than 3) = risk</a:t>
-            </a:r>
-            <a:endParaRPr lang="en-GB" altLang="en-US"/>
-          </a:p>
-          <a:p>
-            <a:r>
-              <a:rPr lang="en-GB" altLang="en-US"/>
-              <a:t>2. high daytime charges meant customers felt overcharged</a:t>
-            </a:r>
-            <a:endParaRPr lang="en-GB" altLang="en-US"/>
-          </a:p>
-          <a:p>
-            <a:r>
-              <a:rPr lang="en-GB" altLang="en-US"/>
-              <a:t>3. having an international plan</a:t>
-            </a:r>
-            <a:endParaRPr lang="en-GB" altLang="en-US"/>
-          </a:p>
-          <a:p>
-            <a:r>
-              <a:rPr lang="en-GB" altLang="en-US"/>
-              <a:t>we also found factors that reduce churn risk</a:t>
-            </a:r>
-            <a:endParaRPr lang="en-GB" altLang="en-US"/>
-          </a:p>
-          <a:p>
-            <a:r>
-              <a:rPr lang="en-GB" altLang="en-US"/>
-              <a:t>1. having a voicemail plan</a:t>
-            </a:r>
-            <a:endParaRPr lang="en-GB" altLang="en-US"/>
-          </a:p>
-          <a:p>
-            <a:r>
-              <a:rPr lang="en-GB" altLang="en-US"/>
-              <a:t>2.higher evening usage</a:t>
-            </a:r>
-            <a:endParaRPr lang="en-GB" altLang="en-US"/>
-          </a:p>
-        </p:txBody>
-      </p:sp>
-    </p:spTree>
-  </p:cSld>
-  <p:clrMapOvr>
-    <a:masterClrMapping/>
-  </p:clrMapOvr>
-</p:sld>
-</file>
-
-<file path=ppt/slides/slide7.xml><?xml version="1.0" encoding="utf-8"?>
-<p:sld xmlns:a="http://schemas.openxmlformats.org/drawingml/2006/main" xmlns:r="http://schemas.openxmlformats.org/officeDocument/2006/relationships" xmlns:p="http://schemas.openxmlformats.org/presentationml/2006/main">
-  <p:cSld>
-    <p:spTree>
-      <p:nvGrpSpPr>
-        <p:cNvPr id="1" name=""/>
-        <p:cNvGrpSpPr/>
-        <p:nvPr/>
-      </p:nvGrpSpPr>
-      <p:grpSpPr/>
-      <p:sp>
-        <p:nvSpPr>
-          <p:cNvPr id="4" name="Title 3"/>
-          <p:cNvSpPr>
-            <a:spLocks noGrp="1"/>
-          </p:cNvSpPr>
-          <p:nvPr>
-            <p:ph type="title"/>
-          </p:nvPr>
-        </p:nvSpPr>
-        <p:spPr/>
-        <p:txBody>
-          <a:bodyPr/>
-          <a:p>
-            <a:r>
-              <a:rPr lang="en-GB" altLang="en-US"/>
-              <a:t>BUSINESS FINDINGS:cont</a:t>
-            </a:r>
-            <a:endParaRPr lang="en-GB" altLang="en-US"/>
-          </a:p>
-        </p:txBody>
-      </p:sp>
-      <p:sp>
-        <p:nvSpPr>
-          <p:cNvPr id="5" name="Content Placeholder 4"/>
-          <p:cNvSpPr>
-            <a:spLocks noGrp="1"/>
-          </p:cNvSpPr>
-          <p:nvPr>
-            <p:ph idx="1"/>
-          </p:nvPr>
-        </p:nvSpPr>
-        <p:spPr/>
-        <p:txBody>
-          <a:bodyPr/>
-          <a:p>
-            <a:r>
-              <a:rPr lang="en-GB" altLang="en-US"/>
-              <a:t>Both models work well, but logistic regression is more reliable for daily predictions since it correctly identifies 8/10 customers who will churn and gives accurate risk scores making it more robust for daily use in comparison to its decision tree counter-part.</a:t>
-            </a:r>
-            <a:endParaRPr lang="en-GB" altLang="en-US"/>
-          </a:p>
-          <a:p>
-            <a:pPr marL="0" indent="0">
-              <a:buNone/>
-            </a:pPr>
-            <a:endParaRPr lang="en-GB" altLang="en-US"/>
-          </a:p>
-        </p:txBody>
-      </p:sp>
-      <p:pic>
-        <p:nvPicPr>
-          <p:cNvPr id="2" name="Picture 1" descr="confusion matrix"/>
-          <p:cNvPicPr>
-            <a:picLocks noChangeAspect="1"/>
-          </p:cNvPicPr>
-          <p:nvPr/>
-        </p:nvPicPr>
-        <p:blipFill>
-          <a:blip r:embed="rId1"/>
-          <a:stretch>
-            <a:fillRect/>
-          </a:stretch>
-        </p:blipFill>
-        <p:spPr>
-          <a:xfrm>
-            <a:off x="2085975" y="3535680"/>
-            <a:ext cx="7686040" cy="2981325"/>
-          </a:xfrm>
-          <a:prstGeom prst="rect">
-            <a:avLst/>
-          </a:prstGeom>
-        </p:spPr>
-      </p:pic>
-    </p:spTree>
-  </p:cSld>
-  <p:clrMapOvr>
-    <a:masterClrMapping/>
-  </p:clrMapOvr>
-</p:sld>
-</file>
-
-<file path=ppt/slides/slide8.xml><?xml version="1.0" encoding="utf-8"?>
+<file path=ppt/slides/slide10.xml><?xml version="1.0" encoding="utf-8"?>
 <p:sld xmlns:a="http://schemas.openxmlformats.org/drawingml/2006/main" xmlns:r="http://schemas.openxmlformats.org/officeDocument/2006/relationships" xmlns:p="http://schemas.openxmlformats.org/presentationml/2006/main">
   <p:cSld>
     <p:spTree>
@@ -3901,6 +3391,697 @@
 </p:sld>
 </file>
 
+<file path=ppt/slides/slide11.xml><?xml version="1.0" encoding="utf-8"?>
+<p:sld xmlns:a="http://schemas.openxmlformats.org/drawingml/2006/main" xmlns:r="http://schemas.openxmlformats.org/officeDocument/2006/relationships" xmlns:p="http://schemas.openxmlformats.org/presentationml/2006/main">
+  <p:cSld>
+    <p:spTree>
+      <p:nvGrpSpPr>
+        <p:cNvPr id="1" name=""/>
+        <p:cNvGrpSpPr/>
+        <p:nvPr/>
+      </p:nvGrpSpPr>
+      <p:grpSpPr/>
+      <p:sp>
+        <p:nvSpPr>
+          <p:cNvPr id="4" name="Title 3"/>
+          <p:cNvSpPr>
+            <a:spLocks noGrp="1"/>
+          </p:cNvSpPr>
+          <p:nvPr>
+            <p:ph type="title"/>
+          </p:nvPr>
+        </p:nvSpPr>
+        <p:spPr/>
+        <p:txBody>
+          <a:bodyPr/>
+          <a:p>
+            <a:r>
+              <a:rPr lang="en-GB" altLang="en-US"/>
+              <a:t>NEXT STEPS</a:t>
+            </a:r>
+            <a:endParaRPr lang="en-GB" altLang="en-US"/>
+          </a:p>
+        </p:txBody>
+      </p:sp>
+      <p:sp>
+        <p:nvSpPr>
+          <p:cNvPr id="5" name="Content Placeholder 4"/>
+          <p:cNvSpPr>
+            <a:spLocks noGrp="1"/>
+          </p:cNvSpPr>
+          <p:nvPr>
+            <p:ph idx="1"/>
+          </p:nvPr>
+        </p:nvSpPr>
+        <p:spPr/>
+        <p:txBody>
+          <a:bodyPr/>
+          <a:p>
+            <a:r>
+              <a:rPr lang="en-GB" altLang="en-US"/>
+              <a:t>A simple dashboard should be created to update churn risk on a weekly basis(excel would suffice)</a:t>
+            </a:r>
+            <a:endParaRPr lang="en-GB" altLang="en-US"/>
+          </a:p>
+        </p:txBody>
+      </p:sp>
+    </p:spTree>
+  </p:cSld>
+  <p:clrMapOvr>
+    <a:masterClrMapping/>
+  </p:clrMapOvr>
+</p:sld>
+</file>
+
+<file path=ppt/slides/slide2.xml><?xml version="1.0" encoding="utf-8"?>
+<p:sld xmlns:a="http://schemas.openxmlformats.org/drawingml/2006/main" xmlns:r="http://schemas.openxmlformats.org/officeDocument/2006/relationships" xmlns:p="http://schemas.openxmlformats.org/presentationml/2006/main">
+  <p:cSld>
+    <p:spTree>
+      <p:nvGrpSpPr>
+        <p:cNvPr id="1" name=""/>
+        <p:cNvGrpSpPr/>
+        <p:nvPr/>
+      </p:nvGrpSpPr>
+      <p:grpSpPr/>
+      <p:sp>
+        <p:nvSpPr>
+          <p:cNvPr id="4" name="Title 3"/>
+          <p:cNvSpPr>
+            <a:spLocks noGrp="1"/>
+          </p:cNvSpPr>
+          <p:nvPr>
+            <p:ph type="title"/>
+          </p:nvPr>
+        </p:nvSpPr>
+        <p:spPr/>
+        <p:txBody>
+          <a:bodyPr/>
+          <a:p>
+            <a:r>
+              <a:rPr lang="en-GB" altLang="en-US"/>
+              <a:t>GOAL</a:t>
+            </a:r>
+            <a:endParaRPr lang="en-GB" altLang="en-US"/>
+          </a:p>
+        </p:txBody>
+      </p:sp>
+      <p:sp>
+        <p:nvSpPr>
+          <p:cNvPr id="5" name="Content Placeholder 4"/>
+          <p:cNvSpPr>
+            <a:spLocks noGrp="1"/>
+          </p:cNvSpPr>
+          <p:nvPr>
+            <p:ph idx="1"/>
+          </p:nvPr>
+        </p:nvSpPr>
+        <p:spPr/>
+        <p:txBody>
+          <a:bodyPr/>
+          <a:p>
+            <a:r>
+              <a:rPr lang="en-US" altLang="en-US"/>
+              <a:t>Project Goal: Predict customer churn to enable proactive retention strategies</a:t>
+            </a:r>
+            <a:endParaRPr lang="en-US" altLang="en-US"/>
+          </a:p>
+          <a:p>
+            <a:endParaRPr lang="en-US" altLang="en-US"/>
+          </a:p>
+          <a:p>
+            <a:r>
+              <a:rPr lang="en-US" altLang="en-US"/>
+              <a:t>Tools: Python, Pandas, Scikit-learn, SMOTE, Matplotlib</a:t>
+            </a:r>
+            <a:endParaRPr lang="en-US" altLang="en-US"/>
+          </a:p>
+          <a:p>
+            <a:endParaRPr lang="en-US" altLang="en-US"/>
+          </a:p>
+          <a:p>
+            <a:r>
+              <a:rPr lang="en-US" altLang="en-US"/>
+              <a:t>Target Audience: Telecom business managers</a:t>
+            </a:r>
+            <a:endParaRPr lang="en-US" altLang="en-US"/>
+          </a:p>
+          <a:p>
+            <a:endParaRPr lang="en-US" altLang="en-US"/>
+          </a:p>
+          <a:p>
+            <a:endParaRPr lang="en-US" altLang="en-US"/>
+          </a:p>
+        </p:txBody>
+      </p:sp>
+    </p:spTree>
+  </p:cSld>
+  <p:clrMapOvr>
+    <a:masterClrMapping/>
+  </p:clrMapOvr>
+</p:sld>
+</file>
+
+<file path=ppt/slides/slide3.xml><?xml version="1.0" encoding="utf-8"?>
+<p:sld xmlns:a="http://schemas.openxmlformats.org/drawingml/2006/main" xmlns:r="http://schemas.openxmlformats.org/officeDocument/2006/relationships" xmlns:p="http://schemas.openxmlformats.org/presentationml/2006/main">
+  <p:cSld>
+    <p:spTree>
+      <p:nvGrpSpPr>
+        <p:cNvPr id="1" name=""/>
+        <p:cNvGrpSpPr/>
+        <p:nvPr/>
+      </p:nvGrpSpPr>
+      <p:grpSpPr/>
+      <p:sp>
+        <p:nvSpPr>
+          <p:cNvPr id="4" name="Title 3"/>
+          <p:cNvSpPr>
+            <a:spLocks noGrp="1"/>
+          </p:cNvSpPr>
+          <p:nvPr>
+            <p:ph type="title"/>
+          </p:nvPr>
+        </p:nvSpPr>
+        <p:spPr/>
+        <p:txBody>
+          <a:bodyPr/>
+          <a:p>
+            <a:r>
+              <a:rPr lang="en-GB" altLang="en-US"/>
+              <a:t>PROJECT OVERVIEW</a:t>
+            </a:r>
+            <a:endParaRPr lang="en-GB" altLang="en-US"/>
+          </a:p>
+        </p:txBody>
+      </p:sp>
+      <p:sp>
+        <p:nvSpPr>
+          <p:cNvPr id="5" name="Content Placeholder 4"/>
+          <p:cNvSpPr>
+            <a:spLocks noGrp="1"/>
+          </p:cNvSpPr>
+          <p:nvPr>
+            <p:ph idx="1"/>
+          </p:nvPr>
+        </p:nvSpPr>
+        <p:spPr/>
+        <p:txBody>
+          <a:bodyPr>
+            <a:normAutofit/>
+          </a:bodyPr>
+          <a:p>
+            <a:r>
+              <a:rPr lang="en-GB" altLang="en-US"/>
+              <a:t>we want to identify “at-risk” customers before they leave since every customer who leaves costs syriatel money.</a:t>
+            </a:r>
+            <a:endParaRPr lang="en-GB" altLang="en-US"/>
+          </a:p>
+          <a:p>
+            <a:r>
+              <a:rPr lang="en-GB" altLang="en-US"/>
+              <a:t>This can be achieved by pondering the question, “Are there any predictable patterns in customer behaviour?”</a:t>
+            </a:r>
+            <a:endParaRPr lang="en-GB" altLang="en-US"/>
+          </a:p>
+          <a:p>
+            <a:pPr marL="0" indent="0">
+              <a:buNone/>
+            </a:pPr>
+            <a:endParaRPr lang="en-US" altLang="en-US"/>
+          </a:p>
+          <a:p>
+            <a:pPr marL="0" indent="0">
+              <a:buNone/>
+            </a:pPr>
+            <a:r>
+              <a:rPr lang="en-US" altLang="en-US"/>
+              <a:t> </a:t>
+            </a:r>
+            <a:r>
+              <a:rPr lang="en-GB" altLang="en-US"/>
+              <a:t>  </a:t>
+            </a:r>
+            <a:endParaRPr lang="en-US" altLang="en-US"/>
+          </a:p>
+        </p:txBody>
+      </p:sp>
+    </p:spTree>
+  </p:cSld>
+  <p:clrMapOvr>
+    <a:masterClrMapping/>
+  </p:clrMapOvr>
+</p:sld>
+</file>
+
+<file path=ppt/slides/slide4.xml><?xml version="1.0" encoding="utf-8"?>
+<p:sld xmlns:a="http://schemas.openxmlformats.org/drawingml/2006/main" xmlns:r="http://schemas.openxmlformats.org/officeDocument/2006/relationships" xmlns:p="http://schemas.openxmlformats.org/presentationml/2006/main">
+  <p:cSld>
+    <p:spTree>
+      <p:nvGrpSpPr>
+        <p:cNvPr id="1" name=""/>
+        <p:cNvGrpSpPr/>
+        <p:nvPr/>
+      </p:nvGrpSpPr>
+      <p:grpSpPr/>
+      <p:sp>
+        <p:nvSpPr>
+          <p:cNvPr id="4" name="Title 3"/>
+          <p:cNvSpPr>
+            <a:spLocks noGrp="1"/>
+          </p:cNvSpPr>
+          <p:nvPr>
+            <p:ph type="title"/>
+          </p:nvPr>
+        </p:nvSpPr>
+        <p:spPr/>
+        <p:txBody>
+          <a:bodyPr/>
+          <a:p>
+            <a:r>
+              <a:rPr lang="en-GB" altLang="en-US"/>
+              <a:t>DATA ANALYSIS/APPROACH</a:t>
+            </a:r>
+            <a:endParaRPr lang="en-GB" altLang="en-US"/>
+          </a:p>
+        </p:txBody>
+      </p:sp>
+      <p:sp>
+        <p:nvSpPr>
+          <p:cNvPr id="5" name="Content Placeholder 4"/>
+          <p:cNvSpPr>
+            <a:spLocks noGrp="1"/>
+          </p:cNvSpPr>
+          <p:nvPr>
+            <p:ph idx="1"/>
+          </p:nvPr>
+        </p:nvSpPr>
+        <p:spPr/>
+        <p:txBody>
+          <a:bodyPr>
+            <a:normAutofit fontScale="90000"/>
+          </a:bodyPr>
+          <a:p>
+            <a:pPr marL="0" indent="0">
+              <a:buNone/>
+            </a:pPr>
+            <a:r>
+              <a:rPr lang="en-GB" altLang="en-US"/>
+              <a:t>.Data cleaning and preprocessing of customer data</a:t>
+            </a:r>
+            <a:endParaRPr lang="en-GB" altLang="en-US"/>
+          </a:p>
+          <a:p>
+            <a:pPr marL="0" indent="0">
+              <a:buNone/>
+            </a:pPr>
+            <a:r>
+              <a:rPr lang="en-GB" altLang="en-US"/>
+              <a:t>.Handling class imbalance using SMOTE</a:t>
+            </a:r>
+            <a:endParaRPr lang="en-GB" altLang="en-US"/>
+          </a:p>
+          <a:p>
+            <a:r>
+              <a:rPr lang="en-GB" altLang="en-US"/>
+              <a:t>We Built two different prediction models using the syriatel churn dataset</a:t>
+            </a:r>
+            <a:endParaRPr lang="en-GB" altLang="en-US"/>
+          </a:p>
+          <a:p>
+            <a:pPr marL="0" indent="0">
+              <a:buNone/>
+            </a:pPr>
+            <a:r>
+              <a:rPr lang="en-GB" altLang="en-US"/>
+              <a:t>  (LOGISTIC REGRESSION and DECISION TREE)</a:t>
+            </a:r>
+            <a:endParaRPr lang="en-GB" altLang="en-US"/>
+          </a:p>
+          <a:p>
+            <a:r>
+              <a:rPr lang="en-GB" altLang="en-US"/>
+              <a:t>Trained on 80% of customers and tested on the remaining 20%.</a:t>
+            </a:r>
+            <a:endParaRPr lang="en-GB" altLang="en-US"/>
+          </a:p>
+          <a:p>
+            <a:pPr marL="0" indent="0">
+              <a:buNone/>
+            </a:pPr>
+            <a:r>
+              <a:rPr lang="en-GB" altLang="en-US"/>
+              <a:t>   KEYWORDS</a:t>
+            </a:r>
+            <a:endParaRPr lang="en-GB" altLang="en-US"/>
+          </a:p>
+          <a:p>
+            <a:r>
+              <a:rPr lang="en-GB" altLang="en-US"/>
+              <a:t>roc-auc - a measure of how well the model seperates leavers from stayers.</a:t>
+            </a:r>
+            <a:endParaRPr lang="en-GB" altLang="en-US"/>
+          </a:p>
+          <a:p>
+            <a:r>
+              <a:rPr lang="en-GB" altLang="en-US"/>
+              <a:t>recall - of all customers who actually left,how many did we catch?</a:t>
+            </a:r>
+            <a:endParaRPr lang="en-GB" altLang="en-US"/>
+          </a:p>
+          <a:p>
+            <a:r>
+              <a:rPr lang="en-GB" altLang="en-US"/>
+              <a:t>precision - of customers flagged as “high risk” , how many actually left?</a:t>
+            </a:r>
+            <a:endParaRPr lang="en-GB" altLang="en-US"/>
+          </a:p>
+          <a:p>
+            <a:endParaRPr lang="en-GB" altLang="en-US"/>
+          </a:p>
+          <a:p>
+            <a:endParaRPr lang="en-GB" altLang="en-US"/>
+          </a:p>
+        </p:txBody>
+      </p:sp>
+    </p:spTree>
+  </p:cSld>
+  <p:clrMapOvr>
+    <a:masterClrMapping/>
+  </p:clrMapOvr>
+</p:sld>
+</file>
+
+<file path=ppt/slides/slide5.xml><?xml version="1.0" encoding="utf-8"?>
+<p:sld xmlns:a="http://schemas.openxmlformats.org/drawingml/2006/main" xmlns:r="http://schemas.openxmlformats.org/officeDocument/2006/relationships" xmlns:p="http://schemas.openxmlformats.org/presentationml/2006/main">
+  <p:cSld>
+    <p:spTree>
+      <p:nvGrpSpPr>
+        <p:cNvPr id="1" name=""/>
+        <p:cNvGrpSpPr/>
+        <p:nvPr/>
+      </p:nvGrpSpPr>
+      <p:grpSpPr/>
+      <p:sp>
+        <p:nvSpPr>
+          <p:cNvPr id="2" name="Title 1"/>
+          <p:cNvSpPr>
+            <a:spLocks noGrp="1"/>
+          </p:cNvSpPr>
+          <p:nvPr>
+            <p:ph type="title"/>
+          </p:nvPr>
+        </p:nvSpPr>
+        <p:spPr/>
+        <p:txBody>
+          <a:bodyPr>
+            <a:normAutofit/>
+          </a:bodyPr>
+          <a:p>
+            <a:r>
+              <a:rPr lang="en-GB" altLang="en-US"/>
+              <a:t>EDA 1 BY CUSTOMER SERVICE PLANS</a:t>
+            </a:r>
+            <a:endParaRPr lang="en-GB" altLang="en-US"/>
+          </a:p>
+        </p:txBody>
+      </p:sp>
+      <p:pic>
+        <p:nvPicPr>
+          <p:cNvPr id="5" name="Content Placeholder 4" descr="customer service calls vs churn"/>
+          <p:cNvPicPr>
+            <a:picLocks noChangeAspect="1"/>
+          </p:cNvPicPr>
+          <p:nvPr>
+            <p:ph idx="1"/>
+          </p:nvPr>
+        </p:nvPicPr>
+        <p:blipFill>
+          <a:blip r:embed="rId1"/>
+          <a:stretch>
+            <a:fillRect/>
+          </a:stretch>
+        </p:blipFill>
+        <p:spPr>
+          <a:xfrm>
+            <a:off x="648970" y="1892935"/>
+            <a:ext cx="11258550" cy="4358005"/>
+          </a:xfrm>
+          <a:prstGeom prst="rect">
+            <a:avLst/>
+          </a:prstGeom>
+        </p:spPr>
+      </p:pic>
+    </p:spTree>
+  </p:cSld>
+  <p:clrMapOvr>
+    <a:masterClrMapping/>
+  </p:clrMapOvr>
+</p:sld>
+</file>
+
+<file path=ppt/slides/slide6.xml><?xml version="1.0" encoding="utf-8"?>
+<p:sld xmlns:a="http://schemas.openxmlformats.org/drawingml/2006/main" xmlns:r="http://schemas.openxmlformats.org/officeDocument/2006/relationships" xmlns:p="http://schemas.openxmlformats.org/presentationml/2006/main">
+  <p:cSld>
+    <p:spTree>
+      <p:nvGrpSpPr>
+        <p:cNvPr id="1" name=""/>
+        <p:cNvGrpSpPr/>
+        <p:nvPr/>
+      </p:nvGrpSpPr>
+      <p:grpSpPr/>
+      <p:sp>
+        <p:nvSpPr>
+          <p:cNvPr id="2" name="Title 1"/>
+          <p:cNvSpPr>
+            <a:spLocks noGrp="1"/>
+          </p:cNvSpPr>
+          <p:nvPr>
+            <p:ph type="title"/>
+          </p:nvPr>
+        </p:nvSpPr>
+        <p:spPr/>
+        <p:txBody>
+          <a:bodyPr>
+            <a:normAutofit/>
+          </a:bodyPr>
+          <a:p>
+            <a:r>
+              <a:rPr lang="en-GB" altLang="en-US"/>
+              <a:t>EDA 1 BY CUSTOMER SERVICE PLANS: cont</a:t>
+            </a:r>
+            <a:endParaRPr lang="en-GB" altLang="en-US"/>
+          </a:p>
+        </p:txBody>
+      </p:sp>
+      <p:sp>
+        <p:nvSpPr>
+          <p:cNvPr id="3" name="Content Placeholder 2"/>
+          <p:cNvSpPr/>
+          <p:nvPr>
+            <p:ph idx="1"/>
+          </p:nvPr>
+        </p:nvSpPr>
+        <p:spPr/>
+        <p:txBody>
+          <a:bodyPr/>
+          <a:p>
+            <a:r>
+              <a:rPr lang="en-US" altLang="en-US"/>
+              <a:t>Interpretation: Customers with an international plan churn at nearly 3x the rate of those without.</a:t>
+            </a:r>
+            <a:endParaRPr lang="en-US" altLang="en-US"/>
+          </a:p>
+          <a:p>
+            <a:endParaRPr lang="en-US" altLang="en-US"/>
+          </a:p>
+          <a:p>
+            <a:r>
+              <a:rPr lang="en-US" altLang="en-US"/>
+              <a:t>Customers without a voicemail plan churn more than twice as often, suggesting voicemail may increase engagement and loyalty.</a:t>
+            </a:r>
+            <a:endParaRPr lang="en-US" altLang="en-US"/>
+          </a:p>
+        </p:txBody>
+      </p:sp>
+    </p:spTree>
+  </p:cSld>
+  <p:clrMapOvr>
+    <a:masterClrMapping/>
+  </p:clrMapOvr>
+</p:sld>
+</file>
+
+<file path=ppt/slides/slide7.xml><?xml version="1.0" encoding="utf-8"?>
+<p:sld xmlns:a="http://schemas.openxmlformats.org/drawingml/2006/main" xmlns:r="http://schemas.openxmlformats.org/officeDocument/2006/relationships" xmlns:p="http://schemas.openxmlformats.org/presentationml/2006/main">
+  <p:cSld>
+    <p:spTree>
+      <p:nvGrpSpPr>
+        <p:cNvPr id="1" name=""/>
+        <p:cNvGrpSpPr/>
+        <p:nvPr/>
+      </p:nvGrpSpPr>
+      <p:grpSpPr/>
+      <p:sp>
+        <p:nvSpPr>
+          <p:cNvPr id="2" name="Title 1"/>
+          <p:cNvSpPr>
+            <a:spLocks noGrp="1"/>
+          </p:cNvSpPr>
+          <p:nvPr>
+            <p:ph type="title"/>
+          </p:nvPr>
+        </p:nvSpPr>
+        <p:spPr/>
+        <p:txBody>
+          <a:bodyPr>
+            <a:normAutofit/>
+          </a:bodyPr>
+          <a:p>
+            <a:r>
+              <a:rPr lang="en-GB" altLang="en-US"/>
+              <a:t>EDA 2. CHURN RATE BY INTERNATIONAL PLAN</a:t>
+            </a:r>
+            <a:endParaRPr lang="en-GB" altLang="en-US"/>
+          </a:p>
+        </p:txBody>
+      </p:sp>
+      <p:pic>
+        <p:nvPicPr>
+          <p:cNvPr id="5" name="Content Placeholder 4" descr="plan vs churn"/>
+          <p:cNvPicPr>
+            <a:picLocks noChangeAspect="1"/>
+          </p:cNvPicPr>
+          <p:nvPr>
+            <p:ph idx="1"/>
+          </p:nvPr>
+        </p:nvPicPr>
+        <p:blipFill>
+          <a:blip r:embed="rId1"/>
+          <a:stretch>
+            <a:fillRect/>
+          </a:stretch>
+        </p:blipFill>
+        <p:spPr>
+          <a:xfrm>
+            <a:off x="723265" y="1258570"/>
+            <a:ext cx="9876790" cy="5154930"/>
+          </a:xfrm>
+          <a:prstGeom prst="rect">
+            <a:avLst/>
+          </a:prstGeom>
+        </p:spPr>
+      </p:pic>
+    </p:spTree>
+  </p:cSld>
+  <p:clrMapOvr>
+    <a:masterClrMapping/>
+  </p:clrMapOvr>
+</p:sld>
+</file>
+
+<file path=ppt/slides/slide8.xml><?xml version="1.0" encoding="utf-8"?>
+<p:sld xmlns:a="http://schemas.openxmlformats.org/drawingml/2006/main" xmlns:r="http://schemas.openxmlformats.org/officeDocument/2006/relationships" xmlns:p="http://schemas.openxmlformats.org/presentationml/2006/main">
+  <p:cSld>
+    <p:spTree>
+      <p:nvGrpSpPr>
+        <p:cNvPr id="1" name=""/>
+        <p:cNvGrpSpPr/>
+        <p:nvPr/>
+      </p:nvGrpSpPr>
+      <p:grpSpPr/>
+      <p:sp>
+        <p:nvSpPr>
+          <p:cNvPr id="4" name="Title 3"/>
+          <p:cNvSpPr>
+            <a:spLocks noGrp="1"/>
+          </p:cNvSpPr>
+          <p:nvPr>
+            <p:ph type="title"/>
+          </p:nvPr>
+        </p:nvSpPr>
+        <p:spPr/>
+        <p:txBody>
+          <a:bodyPr/>
+          <a:p>
+            <a:r>
+              <a:rPr lang="en-GB" altLang="en-US"/>
+              <a:t>BUSINESS FINDINGS</a:t>
+            </a:r>
+            <a:endParaRPr lang="en-GB" altLang="en-US"/>
+          </a:p>
+        </p:txBody>
+      </p:sp>
+      <p:sp>
+        <p:nvSpPr>
+          <p:cNvPr id="5" name="Content Placeholder 4"/>
+          <p:cNvSpPr>
+            <a:spLocks noGrp="1"/>
+          </p:cNvSpPr>
+          <p:nvPr>
+            <p:ph idx="1"/>
+          </p:nvPr>
+        </p:nvSpPr>
+        <p:spPr/>
+        <p:txBody>
+          <a:bodyPr/>
+          <a:p>
+            <a:r>
+              <a:rPr lang="en-GB" altLang="en-US"/>
+              <a:t>we found factors that increase churn risk:</a:t>
+            </a:r>
+            <a:endParaRPr lang="en-GB" altLang="en-US"/>
+          </a:p>
+          <a:p>
+            <a:r>
+              <a:rPr lang="en-GB" altLang="en-US"/>
+              <a:t>1. high number of customer service calls (greater than 3) = risk</a:t>
+            </a:r>
+            <a:endParaRPr lang="en-GB" altLang="en-US"/>
+          </a:p>
+          <a:p>
+            <a:r>
+              <a:rPr lang="en-GB" altLang="en-US"/>
+              <a:t>2. high daytime charges meant customers felt overcharged</a:t>
+            </a:r>
+            <a:endParaRPr lang="en-GB" altLang="en-US"/>
+          </a:p>
+          <a:p>
+            <a:r>
+              <a:rPr lang="en-GB" altLang="en-US"/>
+              <a:t>3. having an international plan</a:t>
+            </a:r>
+            <a:endParaRPr lang="en-GB" altLang="en-US"/>
+          </a:p>
+          <a:p>
+            <a:r>
+              <a:rPr lang="en-GB" altLang="en-US"/>
+              <a:t>we also found factors that reduce churn risk</a:t>
+            </a:r>
+            <a:endParaRPr lang="en-GB" altLang="en-US"/>
+          </a:p>
+          <a:p>
+            <a:r>
+              <a:rPr lang="en-GB" altLang="en-US"/>
+              <a:t>1. having a voicemail plan</a:t>
+            </a:r>
+            <a:endParaRPr lang="en-GB" altLang="en-US"/>
+          </a:p>
+          <a:p>
+            <a:r>
+              <a:rPr lang="en-GB" altLang="en-US"/>
+              <a:t>2.higher evening usage</a:t>
+            </a:r>
+            <a:endParaRPr lang="en-GB" altLang="en-US"/>
+          </a:p>
+        </p:txBody>
+      </p:sp>
+    </p:spTree>
+  </p:cSld>
+  <p:clrMapOvr>
+    <a:masterClrMapping/>
+  </p:clrMapOvr>
+</p:sld>
+</file>
+
 <file path=ppt/slides/slide9.xml><?xml version="1.0" encoding="utf-8"?>
 <p:sld xmlns:a="http://schemas.openxmlformats.org/drawingml/2006/main" xmlns:r="http://schemas.openxmlformats.org/officeDocument/2006/relationships" xmlns:p="http://schemas.openxmlformats.org/presentationml/2006/main">
   <p:cSld>
@@ -3927,7 +4108,7 @@
           <a:p>
             <a:r>
               <a:rPr lang="en-GB" altLang="en-US"/>
-              <a:t>NEXT STEPS</a:t>
+              <a:t>BUSINESS FINDINGS:cont</a:t>
             </a:r>
             <a:endParaRPr lang="en-GB" altLang="en-US"/>
           </a:p>
@@ -3949,12 +4130,45 @@
           <a:p>
             <a:r>
               <a:rPr lang="en-GB" altLang="en-US"/>
-              <a:t>A simple dashboard should be created to update churn risk on a weekly basis(excel would suffice)</a:t>
+              <a:t>Both models work well, but logistic regression is more reliable for daily predictions since it correctly identifies 8/10 customers who will churn and gives accurate risk scores making it more robust for daily use in comparison to its decision tree counter-part.</a:t>
             </a:r>
             <a:endParaRPr lang="en-GB" altLang="en-US"/>
           </a:p>
-        </p:txBody>
-      </p:sp>
+          <a:p>
+            <a:endParaRPr lang="en-GB" altLang="en-US"/>
+          </a:p>
+          <a:p>
+            <a:pPr marL="0" indent="0">
+              <a:buNone/>
+            </a:pPr>
+            <a:endParaRPr lang="en-GB" altLang="en-US"/>
+          </a:p>
+        </p:txBody>
+      </p:sp>
+      <p:pic>
+        <p:nvPicPr>
+          <p:cNvPr id="2" name="Picture 1" descr="confusion matrix"/>
+          <p:cNvPicPr>
+            <a:picLocks noChangeAspect="1"/>
+          </p:cNvPicPr>
+          <p:nvPr/>
+        </p:nvPicPr>
+        <p:blipFill>
+          <a:blip r:embed="rId1"/>
+          <a:stretch>
+            <a:fillRect/>
+          </a:stretch>
+        </p:blipFill>
+        <p:spPr>
+          <a:xfrm>
+            <a:off x="2085975" y="3535680"/>
+            <a:ext cx="7686040" cy="2981325"/>
+          </a:xfrm>
+          <a:prstGeom prst="rect">
+            <a:avLst/>
+          </a:prstGeom>
+        </p:spPr>
+      </p:pic>
     </p:spTree>
   </p:cSld>
   <p:clrMapOvr>
